--- a/Presentation.pptx
+++ b/Presentation.pptx
@@ -119,6 +119,50 @@
     </p:ext>
   </p:extLst>
 </p:presentation>
+</file>
+
+<file path=ppt/changesInfos/changesInfo1.xml><?xml version="1.0" encoding="utf-8"?>
+<pc:chgInfo xmlns:a="http://schemas.openxmlformats.org/drawingml/2006/main" xmlns:r="http://schemas.openxmlformats.org/officeDocument/2006/relationships" xmlns:ac="http://schemas.microsoft.com/office/drawing/2013/main/command" xmlns:pc="http://schemas.microsoft.com/office/powerpoint/2013/main/command">
+  <pc:docChgLst>
+    <pc:chgData name="Muchammad Wildan Alkautsar" userId="360672ed2ee56274" providerId="LiveId" clId="{F5771622-C242-4EFB-9359-41E4DFBD7538}"/>
+    <pc:docChg chg="modSld">
+      <pc:chgData name="Muchammad Wildan Alkautsar" userId="360672ed2ee56274" providerId="LiveId" clId="{F5771622-C242-4EFB-9359-41E4DFBD7538}" dt="2026-10-25T00:11:38.385" v="9" actId="20577"/>
+      <pc:docMkLst>
+        <pc:docMk/>
+      </pc:docMkLst>
+      <pc:sldChg chg="modSp mod">
+        <pc:chgData name="Muchammad Wildan Alkautsar" userId="360672ed2ee56274" providerId="LiveId" clId="{F5771622-C242-4EFB-9359-41E4DFBD7538}" dt="2026-10-25T00:11:20.864" v="7" actId="20577"/>
+        <pc:sldMkLst>
+          <pc:docMk/>
+          <pc:sldMk cId="0" sldId="257"/>
+        </pc:sldMkLst>
+        <pc:spChg chg="mod">
+          <ac:chgData name="Muchammad Wildan Alkautsar" userId="360672ed2ee56274" providerId="LiveId" clId="{F5771622-C242-4EFB-9359-41E4DFBD7538}" dt="2026-10-25T00:11:20.864" v="7" actId="20577"/>
+          <ac:spMkLst>
+            <pc:docMk/>
+            <pc:sldMk cId="0" sldId="257"/>
+            <ac:spMk id="18" creationId="{00000000-0000-0000-0000-000000000000}"/>
+          </ac:spMkLst>
+        </pc:spChg>
+      </pc:sldChg>
+      <pc:sldChg chg="modSp mod">
+        <pc:chgData name="Muchammad Wildan Alkautsar" userId="360672ed2ee56274" providerId="LiveId" clId="{F5771622-C242-4EFB-9359-41E4DFBD7538}" dt="2026-10-25T00:11:38.385" v="9" actId="20577"/>
+        <pc:sldMkLst>
+          <pc:docMk/>
+          <pc:sldMk cId="0" sldId="259"/>
+        </pc:sldMkLst>
+        <pc:spChg chg="mod">
+          <ac:chgData name="Muchammad Wildan Alkautsar" userId="360672ed2ee56274" providerId="LiveId" clId="{F5771622-C242-4EFB-9359-41E4DFBD7538}" dt="2026-10-25T00:11:38.385" v="9" actId="20577"/>
+          <ac:spMkLst>
+            <pc:docMk/>
+            <pc:sldMk cId="0" sldId="259"/>
+            <ac:spMk id="3" creationId="{00000000-0000-0000-0000-000000000000}"/>
+          </ac:spMkLst>
+        </pc:spChg>
+      </pc:sldChg>
+    </pc:docChg>
+  </pc:docChgLst>
+</pc:chgInfo>
 </file>
 
 <file path=ppt/charts/chart1.xml><?xml version="1.0" encoding="utf-8"?>
@@ -4450,7 +4494,7 @@
                 <a:ea typeface="Calibri" pitchFamily="34" charset="-122"/>
                 <a:cs typeface="Calibri" pitchFamily="34" charset="-120"/>
               </a:rPr>
-              <a:t>This project analyzes the data to uncover evidence-based insights — seasonality, top problem areas, resolution consistency, and untimely-response drivers — so teams can prioritize improvements based on data, not assumptions.</a:t>
+              <a:t>This project analyzes the data to uncover evidence-based insights seasonality, top problem areas, resolution consistency, and untimely-response drivers, so teams can prioritize improvements based on data, not assumptions.</a:t>
             </a:r>
             <a:endParaRPr lang="en-US" sz="1250" dirty="0"/>
           </a:p>
@@ -5510,7 +5554,7 @@
                 <a:ea typeface="Cambria" pitchFamily="34" charset="-122"/>
                 <a:cs typeface="Cambria" pitchFamily="34" charset="-120"/>
               </a:rPr>
-              <a:t>Complaint Volume Spikes Sharply in July 2023</a:t>
+              <a:t>Complaint Volume Spikes Sharply At July 2023</a:t>
             </a:r>
             <a:endParaRPr lang="en-US" sz="2800" dirty="0"/>
           </a:p>
